--- a/materials/pdf/original/DS11_Folien_Sprache-natuerlich-oder-formal.pptx
+++ b/materials/pdf/original/DS11_Folien_Sprache-natuerlich-oder-formal.pptx
@@ -125,12 +125,12 @@
   <p:extLst>
     <p:ext uri="{521415D9-36F7-43E2-AB2F-B90AF26B5E84}">
       <p14:sectionLst xmlns:p14="http://schemas.microsoft.com/office/powerpoint/2010/main">
-        <p14:section name="Start" id="{21972bf0-b6c5-cfaf-87a2-4f685180a531}">
+        <p14:section name="Start" id="{90095732-f6fb-0b06-5ca8-34f5032c2878}">
           <p14:sldIdLst>
             <p14:sldId id="256"/>
           </p14:sldIdLst>
         </p14:section>
-        <p14:section name="Einstieg" id="{b075b7ce-49b1-b0ac-e930-8fc3d0f093f2}">
+        <p14:section name="Einstieg" id="{1f13b6c6-6f8f-f9e4-7303-46682ecfd627}">
           <p14:sldIdLst>
             <p14:sldId id="257"/>
             <p14:sldId id="258"/>
@@ -139,7 +139,7 @@
             <p14:sldId id="261"/>
           </p14:sldIdLst>
         </p14:section>
-        <p14:section name="Erarbeitung" id="{1b7f6d59-b1c0-8ffe-d93a-9769122015f5}">
+        <p14:section name="Erarbeitung" id="{e19a1e6a-1c9d-7d1b-1585-293e5e3142be}">
           <p14:sldIdLst>
             <p14:sldId id="262"/>
             <p14:sldId id="263"/>
@@ -150,20 +150,20 @@
             <p14:sldId id="268"/>
           </p14:sldIdLst>
         </p14:section>
-        <p14:section name="Übung" id="{f3a09678-f492-1be0-b8e7-cb4e1c261b88}">
+        <p14:section name="Übung" id="{ab5ded88-15d2-7493-cc2d-40f18e0d971b}">
           <p14:sldIdLst>
             <p14:sldId id="269"/>
             <p14:sldId id="270"/>
             <p14:sldId id="271"/>
           </p14:sldIdLst>
         </p14:section>
-        <p14:section name="Sicherung" id="{9b6407c9-d48f-eb4a-43d7-5b715c533490}">
+        <p14:section name="Sicherung" id="{1f9fe8a3-d866-7a9c-ea6e-15d38378ce4e}">
           <p14:sldIdLst>
             <p14:sldId id="272"/>
             <p14:sldId id="273"/>
           </p14:sldIdLst>
         </p14:section>
-        <p14:section name="Abschluss" id="{547b212b-80e5-0b44-8692-938f2d184163}">
+        <p14:section name="Abschluss" id="{c54779ae-db5d-809b-668b-c37529893b91}">
           <p14:sldIdLst>
             <p14:sldId id="274"/>
           </p14:sldIdLst>
@@ -924,7 +924,7 @@
           <a:p>
             <a:r>
               <a:rPr lang="en-US" dirty="0"/>
-              <a:t>Erst nach der Übungsphase aufdecken (AB 1c). Im Abitur: „Vergleichen Sie anhand zweier Aspekte …“ (Abi 2023 Nachschreibtermin D a).</a:t>
+              <a:t>[NUR LEHRKRAFT] Erst nach der Übungsphase aufdecken (AB 1c). Im Abitur: „Vergleichen Sie anhand zweier Aspekte …“ (Abi 2023 Nachschreibtermin D a).</a:t>
             </a:r>
             <a:endParaRPr lang="en-US" dirty="0"/>
           </a:p>

--- a/materials/pdf/original/DS11_Folien_Sprache-natuerlich-oder-formal.pptx
+++ b/materials/pdf/original/DS11_Folien_Sprache-natuerlich-oder-formal.pptx
@@ -125,12 +125,12 @@
   <p:extLst>
     <p:ext uri="{521415D9-36F7-43E2-AB2F-B90AF26B5E84}">
       <p14:sectionLst xmlns:p14="http://schemas.microsoft.com/office/powerpoint/2010/main">
-        <p14:section name="Start" id="{90095732-f6fb-0b06-5ca8-34f5032c2878}">
+        <p14:section name="Start" id="{af99fac3-4445-74a2-1167-af70e1d5f7c7}">
           <p14:sldIdLst>
             <p14:sldId id="256"/>
           </p14:sldIdLst>
         </p14:section>
-        <p14:section name="Einstieg" id="{1f13b6c6-6f8f-f9e4-7303-46682ecfd627}">
+        <p14:section name="Einstieg" id="{02af7c4c-f681-780f-368a-e9dabc7b34bc}">
           <p14:sldIdLst>
             <p14:sldId id="257"/>
             <p14:sldId id="258"/>
@@ -139,7 +139,7 @@
             <p14:sldId id="261"/>
           </p14:sldIdLst>
         </p14:section>
-        <p14:section name="Erarbeitung" id="{e19a1e6a-1c9d-7d1b-1585-293e5e3142be}">
+        <p14:section name="Erarbeitung" id="{5fba63aa-d00e-f282-5250-2be7e5544c49}">
           <p14:sldIdLst>
             <p14:sldId id="262"/>
             <p14:sldId id="263"/>
@@ -150,20 +150,20 @@
             <p14:sldId id="268"/>
           </p14:sldIdLst>
         </p14:section>
-        <p14:section name="Übung" id="{ab5ded88-15d2-7493-cc2d-40f18e0d971b}">
+        <p14:section name="Übung" id="{63de2ede-265d-72f9-f223-f7a6eedf7166}">
           <p14:sldIdLst>
             <p14:sldId id="269"/>
             <p14:sldId id="270"/>
             <p14:sldId id="271"/>
           </p14:sldIdLst>
         </p14:section>
-        <p14:section name="Sicherung" id="{1f9fe8a3-d866-7a9c-ea6e-15d38378ce4e}">
+        <p14:section name="Sicherung" id="{b4334d54-5d63-62a8-97d6-a69f3114b675}">
           <p14:sldIdLst>
             <p14:sldId id="272"/>
             <p14:sldId id="273"/>
           </p14:sldIdLst>
         </p14:section>
-        <p14:section name="Abschluss" id="{c54779ae-db5d-809b-668b-c37529893b91}">
+        <p14:section name="Abschluss" id="{1a16eaf7-113a-3910-8715-f6101c2b3971}">
           <p14:sldIdLst>
             <p14:sldId id="274"/>
           </p14:sldIdLst>
@@ -2483,6 +2483,45 @@
       </p:sp>
       <p:sp>
         <p:nvSpPr>
+          <p:cNvPr id="4" name="Text 1"/>
+          <p:cNvSpPr/>
+          <p:nvPr/>
+        </p:nvSpPr>
+        <p:spPr>
+          <a:xfrm>
+            <a:off x="7985455" y="6473952"/>
+            <a:ext cx="2926080" cy="274320"/>
+          </a:xfrm>
+          <a:prstGeom prst="rect">
+            <a:avLst/>
+          </a:prstGeom>
+          <a:noFill/>
+          <a:ln/>
+        </p:spPr>
+        <p:txBody>
+          <a:bodyPr wrap="square" lIns="0" tIns="0" rIns="0" bIns="0" rtlCol="0" anchor="ctr"/>
+          <a:lstStyle/>
+          <a:p>
+            <a:pPr algn="r" indent="0" marL="0">
+              <a:buNone/>
+            </a:pPr>
+            <a:r>
+              <a:rPr lang="en-US" sz="1100" dirty="0">
+                <a:solidFill>
+                  <a:srgbClr val="5B6770"/>
+                </a:solidFill>
+                <a:latin typeface="Calibri" pitchFamily="34" charset="0"/>
+                <a:ea typeface="Calibri" pitchFamily="34" charset="-122"/>
+                <a:cs typeface="Calibri" pitchFamily="34" charset="-120"/>
+              </a:rPr>
+              <a:t>CC BY-SA 4.0 · Frank Juchim</a:t>
+            </a:r>
+            <a:endParaRPr lang="en-US" sz="1100" dirty="0"/>
+          </a:p>
+        </p:txBody>
+      </p:sp>
+      <p:sp>
+        <p:nvSpPr>
           <p:cNvPr id="25" name="Slide Number Placeholder 0"/>
           <p:cNvSpPr>
             <a:spLocks noGrp="1"/>
@@ -2634,6 +2673,45 @@
                 <a:cs typeface="Calibri" pitchFamily="34" charset="-120"/>
               </a:rPr>
               <a:t>Level 11 · Welt C · Formale Sprachen · nur eA (Leistungskurs)</a:t>
+            </a:r>
+            <a:endParaRPr lang="en-US" sz="1100" dirty="0"/>
+          </a:p>
+        </p:txBody>
+      </p:sp>
+      <p:sp>
+        <p:nvSpPr>
+          <p:cNvPr id="4" name="Text 1"/>
+          <p:cNvSpPr/>
+          <p:nvPr/>
+        </p:nvSpPr>
+        <p:spPr>
+          <a:xfrm>
+            <a:off x="7985455" y="6473952"/>
+            <a:ext cx="2926080" cy="274320"/>
+          </a:xfrm>
+          <a:prstGeom prst="rect">
+            <a:avLst/>
+          </a:prstGeom>
+          <a:noFill/>
+          <a:ln/>
+        </p:spPr>
+        <p:txBody>
+          <a:bodyPr wrap="square" lIns="0" tIns="0" rIns="0" bIns="0" rtlCol="0" anchor="ctr"/>
+          <a:lstStyle/>
+          <a:p>
+            <a:pPr algn="r" indent="0" marL="0">
+              <a:buNone/>
+            </a:pPr>
+            <a:r>
+              <a:rPr lang="en-US" sz="1100" dirty="0">
+                <a:solidFill>
+                  <a:srgbClr val="5B6770"/>
+                </a:solidFill>
+                <a:latin typeface="Calibri" pitchFamily="34" charset="0"/>
+                <a:ea typeface="Calibri" pitchFamily="34" charset="-122"/>
+                <a:cs typeface="Calibri" pitchFamily="34" charset="-120"/>
+              </a:rPr>
+              <a:t>CC BY-SA 4.0 · Frank Juchim</a:t>
             </a:r>
             <a:endParaRPr lang="en-US" sz="1100" dirty="0"/>
           </a:p>
